--- a/walkthrough/JanVayu_Full_Walkthrough.pptx
+++ b/walkthrough/JanVayu_Full_Walkthrough.pptx
@@ -607,7 +607,7 @@
           <a:lstStyle/>
           <a:p>
             <a:r>
-              <a:t>Be honest on screen that the air layer is a live estimate of the citywide SPREAD, not a per-street reading. 24 of the 39 cities use Swachh Bharat Mission ward boundaries via indianopenmaps.com; a few (Rajkot, Vadodara) published only coarse revenue wards, and we show what they published.</a:t>
+              <a:t>Rankings and comparison are the most shared surfaces; show the share-card generator.</a:t>
             </a:r>
           </a:p>
         </p:txBody>
@@ -677,7 +677,7 @@
           <a:lstStyle/>
           <a:p>
             <a:r>
-              <a:t>Push is real VAPID web push; alerts are gated on a user-picked threshold.</a:t>
+              <a:t>The forecast is key-less and free; it feeds the chatbot’s tomorrow-answers too.</a:t>
             </a:r>
           </a:p>
         </p:txBody>
@@ -747,7 +747,7 @@
           <a:lstStyle/>
           <a:p>
             <a:r>
-              <a:t>Beyond-the-lungs is the emotional core; use the hand-drawn body diagram.</a:t>
+              <a:t>Be honest on screen that the air layer is a live estimate of the citywide SPREAD, not a per-street reading. 24 of the 39 cities use Swachh Bharat Mission ward boundaries via indianopenmaps.com; a few (Rajkot, Vadodara) published only coarse revenue wards, and we show what they published.</a:t>
             </a:r>
           </a:p>
         </p:txBody>
@@ -817,7 +817,7 @@
           <a:lstStyle/>
           <a:p>
             <a:r>
-              <a:t>Frame as an equity story; both panels carry the corrected, fact-checked figures.</a:t>
+              <a:t>Push is real VAPID web push; alerts are gated on a user-picked threshold.</a:t>
             </a:r>
           </a:p>
         </p:txBody>
@@ -887,7 +887,7 @@
           <a:lstStyle/>
           <a:p>
             <a:r>
-              <a:t>The diary is a habit tool; note it is localStorage-only today.</a:t>
+              <a:t>Chapter 3 — Health &amp; exposure. Translate the numbers into what they mean for a body.</a:t>
             </a:r>
           </a:p>
         </p:txBody>
@@ -957,7 +957,7 @@
           <a:lstStyle/>
           <a:p>
             <a:r>
-              <a:t>These are the decision tools; the purifier sizing and GRAP rules are fact-checked.</a:t>
+              <a:t>Beyond-the-lungs is the emotional core; use the hand-drawn body diagram.</a:t>
             </a:r>
           </a:p>
         </p:txBody>
@@ -1027,7 +1027,7 @@
           <a:lstStyle/>
           <a:p>
             <a:r>
-              <a:t>Use the economy diagram; the $339B figure is the corrected, sourced value with its method noted.</a:t>
+              <a:t>Frame as an equity story; both panels carry the corrected, fact-checked figures.</a:t>
             </a:r>
           </a:p>
         </p:txBody>
@@ -1097,7 +1097,7 @@
           <a:lstStyle/>
           <a:p>
             <a:r>
-              <a:t>Budget figures were refreshed to CREA 2026 in the fact-check; note the dust-vs-source mismatch.</a:t>
+              <a:t>The diary is a habit tool; note it is localStorage-only today.</a:t>
             </a:r>
           </a:p>
         </p:txBody>
@@ -1167,7 +1167,7 @@
           <a:lstStyle/>
           <a:p>
             <a:r>
-              <a:t>The scorecard’s “File an RTI” pre-fills the RTI Assistant for that city.</a:t>
+              <a:t>These are the decision tools; the purifier sizing and GRAP rules are fact-checked.</a:t>
             </a:r>
           </a:p>
         </p:txBody>
@@ -1237,7 +1237,7 @@
           <a:lstStyle/>
           <a:p>
             <a:r>
-              <a:t>The apportionment ring is the newest panel; each city cites its own study with a method caveat.</a:t>
+              <a:t>Chapter 4 — The economic bill. The macroeconomic case, for policy audiences.</a:t>
             </a:r>
           </a:p>
         </p:txBody>
@@ -1307,7 +1307,7 @@
           <a:lstStyle/>
           <a:p>
             <a:r>
-              <a:t>Open on the human scale, sourced. These are the anchor numbers repeated across the site, each fact-checked against its primary source.</a:t>
+              <a:t>Chapter 1 — Why it exists. Set the stakes and the stance before touching the product.</a:t>
             </a:r>
           </a:p>
         </p:txBody>
@@ -1377,7 +1377,7 @@
           <a:lstStyle/>
           <a:p>
             <a:r>
-              <a:t>Demo the scorecard → RTI hand-off; it’s the platform’s theory of change in one flow.</a:t>
+              <a:t>Use the economy diagram; the $339B figure is the corrected, sourced value with its method noted.</a:t>
             </a:r>
           </a:p>
         </p:txBody>
@@ -1447,7 +1447,7 @@
           <a:lstStyle/>
           <a:p>
             <a:r>
-              <a:t>Games + the new air-literacy quiz make this classroom-ready; workshops connect to a live facilitator.</a:t>
+              <a:t>Chapter 5 — Following the money. Accountability — the differentiator versus a plain dashboard.</a:t>
             </a:r>
           </a:p>
         </p:txBody>
@@ -1517,7 +1517,7 @@
           <a:lstStyle/>
           <a:p>
             <a:r>
-              <a:t>Story-of-the-week rotates weekly with no deploy; it surfaces the blog.</a:t>
+              <a:t>Budget figures were refreshed to CREA 2026 in the fact-check; note the dust-vs-source mismatch.</a:t>
             </a:r>
           </a:p>
         </p:txBody>
@@ -1587,7 +1587,7 @@
           <a:lstStyle/>
           <a:p>
             <a:r>
-              <a:t>Be candid: grounding the chatbot in the verified figures with citations is the next trust upgrade.</a:t>
+              <a:t>The scorecard’s “File an RTI” pre-fills the RTI Assistant for that city.</a:t>
             </a:r>
           </a:p>
         </p:txBody>
@@ -1657,7 +1657,7 @@
           <a:lstStyle/>
           <a:p>
             <a:r>
-              <a:t>Reading List is a real Zotero group; the AQI explainer’s CPCB-vs-EPA table was just corrected.</a:t>
+              <a:t>The apportionment ring is the newest panel; each city cites its own study with a method caveat.</a:t>
             </a:r>
           </a:p>
         </p:txBody>
@@ -1727,7 +1727,7 @@
           <a:lstStyle/>
           <a:p>
             <a:r>
-              <a:t>The API + embeds are the “use JanVayu in your work” surface; licence and citation are included.</a:t>
+              <a:t>Demo the scorecard → RTI hand-off; it’s the platform’s theory of change in one flow.</a:t>
             </a:r>
           </a:p>
         </p:txBody>
@@ -1797,7 +1797,7 @@
           <a:lstStyle/>
           <a:p>
             <a:r>
-              <a:t>This is what separates JanVayu from a marketing site; the weekly PR-for-review loop is real.</a:t>
+              <a:t>Chapter 6 — Citizen action. Turn readers into participants.</a:t>
             </a:r>
           </a:p>
         </p:txBody>
@@ -1867,7 +1867,7 @@
           <a:lstStyle/>
           <a:p>
             <a:r>
-              <a:t>The live-vs-annual honesty is a recurring theme; it protects the platform from over-claiming.</a:t>
+              <a:t>Games + the new air-literacy quiz make this classroom-ready; workshops connect to a live facilitator.</a:t>
             </a:r>
           </a:p>
         </p:txBody>
@@ -1937,7 +1937,7 @@
           <a:lstStyle/>
           <a:p>
             <a:r>
-              <a:t>Close on agency: the point of all this data is to be used. Point to the API, the RTI Assistant, and contribute@janvayu.in.</a:t>
+              <a:t>Story-of-the-week rotates weekly with no deploy; it surfaces the blog.</a:t>
             </a:r>
           </a:p>
         </p:txBody>
@@ -1962,7 +1962,7 @@
 </p:notes>
 </file>
 
-<file path=ppt/notesSlides/notesSlide3.xml><?xml version="1.0" encoding="utf-8"?>
+<file path=ppt/notesSlides/notesSlide29.xml><?xml version="1.0" encoding="utf-8"?>
 <p:notes xmlns:a="http://schemas.openxmlformats.org/drawingml/2006/main" xmlns:p="http://schemas.openxmlformats.org/presentationml/2006/main" xmlns:r="http://schemas.openxmlformats.org/officeDocument/2006/relationships">
   <p:cSld>
     <p:spTree>
@@ -2007,7 +2007,7 @@
           <a:lstStyle/>
           <a:p>
             <a:r>
-              <a:t>Establish trust posture early: independence, sourcing, and the self-fact-checking discipline are the platform’s backbone.</a:t>
+              <a:t>Chapter 7 — Tools &amp; knowledge. The reference layer and the take-it-with-you surfaces.</a:t>
             </a:r>
           </a:p>
         </p:txBody>
@@ -2032,7 +2032,7 @@
 </p:notes>
 </file>
 
-<file path=ppt/notesSlides/notesSlide4.xml><?xml version="1.0" encoding="utf-8"?>
+<file path=ppt/notesSlides/notesSlide3.xml><?xml version="1.0" encoding="utf-8"?>
 <p:notes xmlns:a="http://schemas.openxmlformats.org/drawingml/2006/main" xmlns:p="http://schemas.openxmlformats.org/presentationml/2006/main" xmlns:r="http://schemas.openxmlformats.org/officeDocument/2006/relationships">
   <p:cSld>
     <p:spTree>
@@ -2077,7 +2077,7 @@
           <a:lstStyle/>
           <a:p>
             <a:r>
-              <a:t>The value-add is synthesis and honesty, not owning sensors. Name the sources so users can verify.</a:t>
+              <a:t>Open on the human scale, sourced. These are the anchor numbers repeated across the site, each fact-checked against its primary source.</a:t>
             </a:r>
           </a:p>
         </p:txBody>
@@ -2102,7 +2102,7 @@
 </p:notes>
 </file>
 
-<file path=ppt/notesSlides/notesSlide5.xml><?xml version="1.0" encoding="utf-8"?>
+<file path=ppt/notesSlides/notesSlide30.xml><?xml version="1.0" encoding="utf-8"?>
 <p:notes xmlns:a="http://schemas.openxmlformats.org/drawingml/2006/main" xmlns:p="http://schemas.openxmlformats.org/presentationml/2006/main" xmlns:r="http://schemas.openxmlformats.org/officeDocument/2006/relationships">
   <p:cSld>
     <p:spTree>
@@ -2147,7 +2147,7 @@
           <a:lstStyle/>
           <a:p>
             <a:r>
-              <a:t>Walk the dashboard top to bottom; point out the city selector drives the whole page.</a:t>
+              <a:t>Be candid: grounding the chatbot in the verified figures with citations is the next trust upgrade.</a:t>
             </a:r>
           </a:p>
         </p:txBody>
@@ -2172,7 +2172,7 @@
 </p:notes>
 </file>
 
-<file path=ppt/notesSlides/notesSlide6.xml><?xml version="1.0" encoding="utf-8"?>
+<file path=ppt/notesSlides/notesSlide31.xml><?xml version="1.0" encoding="utf-8"?>
 <p:notes xmlns:a="http://schemas.openxmlformats.org/drawingml/2006/main" xmlns:p="http://schemas.openxmlformats.org/presentationml/2006/main" xmlns:r="http://schemas.openxmlformats.org/officeDocument/2006/relationships">
   <p:cSld>
     <p:spTree>
@@ -2217,7 +2217,7 @@
           <a:lstStyle/>
           <a:p>
             <a:r>
-              <a:t>Core cities load live; the rest load when picked, to stay inside the data source’s free tier — but that’s a build detail, not something the reader needs on screen.</a:t>
+              <a:t>Reading List is a real Zotero group; the AQI explainer’s CPCB-vs-EPA table was just corrected.</a:t>
             </a:r>
           </a:p>
         </p:txBody>
@@ -2242,7 +2242,7 @@
 </p:notes>
 </file>
 
-<file path=ppt/notesSlides/notesSlide7.xml><?xml version="1.0" encoding="utf-8"?>
+<file path=ppt/notesSlides/notesSlide32.xml><?xml version="1.0" encoding="utf-8"?>
 <p:notes xmlns:a="http://schemas.openxmlformats.org/drawingml/2006/main" xmlns:p="http://schemas.openxmlformats.org/presentationml/2006/main" xmlns:r="http://schemas.openxmlformats.org/officeDocument/2006/relationships">
   <p:cSld>
     <p:spTree>
@@ -2287,7 +2287,7 @@
           <a:lstStyle/>
           <a:p>
             <a:r>
-              <a:t>Emphasise the grey constituencies: that is the real monitoring gap, not a rendering error. Boundaries and source locations come from indianopenmaps.com (SBM, LGD, GatiShakti mirrors), attributed on the map.</a:t>
+              <a:t>The API + embeds are the “use JanVayu in your work” surface; licence and citation are included.</a:t>
             </a:r>
           </a:p>
         </p:txBody>
@@ -2312,7 +2312,7 @@
 </p:notes>
 </file>
 
-<file path=ppt/notesSlides/notesSlide8.xml><?xml version="1.0" encoding="utf-8"?>
+<file path=ppt/notesSlides/notesSlide33.xml><?xml version="1.0" encoding="utf-8"?>
 <p:notes xmlns:a="http://schemas.openxmlformats.org/drawingml/2006/main" xmlns:p="http://schemas.openxmlformats.org/presentationml/2006/main" xmlns:r="http://schemas.openxmlformats.org/officeDocument/2006/relationships">
   <p:cSld>
     <p:spTree>
@@ -2357,7 +2357,7 @@
           <a:lstStyle/>
           <a:p>
             <a:r>
-              <a:t>Rankings and comparison are the most shared surfaces; show the share-card generator.</a:t>
+              <a:t>Chapter 8 — Trust. Close the loop on why any of these numbers can be believed.</a:t>
             </a:r>
           </a:p>
         </p:txBody>
@@ -2382,7 +2382,7 @@
 </p:notes>
 </file>
 
-<file path=ppt/notesSlides/notesSlide9.xml><?xml version="1.0" encoding="utf-8"?>
+<file path=ppt/notesSlides/notesSlide34.xml><?xml version="1.0" encoding="utf-8"?>
 <p:notes xmlns:a="http://schemas.openxmlformats.org/drawingml/2006/main" xmlns:p="http://schemas.openxmlformats.org/presentationml/2006/main" xmlns:r="http://schemas.openxmlformats.org/officeDocument/2006/relationships">
   <p:cSld>
     <p:spTree>
@@ -2427,7 +2427,567 @@
           <a:lstStyle/>
           <a:p>
             <a:r>
-              <a:t>The forecast is key-less and free; it feeds the chatbot’s tomorrow-answers too.</a:t>
+              <a:t>This is what separates JanVayu from a marketing site; the weekly PR-for-review loop is real.</a:t>
+            </a:r>
+          </a:p>
+        </p:txBody>
+      </p:sp>
+      <p:sp>
+        <p:nvSpPr>
+          <p:cNvPr id="4" name="Slide Number Placeholder 3"/>
+          <p:cNvSpPr>
+            <a:spLocks noGrp="1"/>
+          </p:cNvSpPr>
+          <p:nvPr>
+            <p:ph type="sldNum" idx="5" sz="quarter"/>
+          </p:nvPr>
+        </p:nvSpPr>
+        <p:spPr/>
+      </p:sp>
+    </p:spTree>
+  </p:cSld>
+  <p:clrMapOvr>
+    <a:masterClrMapping/>
+  </p:clrMapOvr>
+</p:notes>
+</file>
+
+<file path=ppt/notesSlides/notesSlide35.xml><?xml version="1.0" encoding="utf-8"?>
+<p:notes xmlns:a="http://schemas.openxmlformats.org/drawingml/2006/main" xmlns:p="http://schemas.openxmlformats.org/presentationml/2006/main" xmlns:r="http://schemas.openxmlformats.org/officeDocument/2006/relationships">
+  <p:cSld>
+    <p:spTree>
+      <p:nvGrpSpPr>
+        <p:cNvPr id="1" name=""/>
+        <p:cNvGrpSpPr/>
+        <p:nvPr/>
+      </p:nvGrpSpPr>
+      <p:grpSpPr>
+        <a:xfrm>
+          <a:off x="0" y="0"/>
+          <a:ext cx="0" cy="0"/>
+          <a:chOff x="0" y="0"/>
+          <a:chExt cx="0" cy="0"/>
+        </a:xfrm>
+      </p:grpSpPr>
+      <p:sp>
+        <p:nvSpPr>
+          <p:cNvPr id="2" name="Slide Image Placeholder 1"/>
+          <p:cNvSpPr>
+            <a:spLocks noGrp="1"/>
+          </p:cNvSpPr>
+          <p:nvPr>
+            <p:ph type="sldImg" idx="2"/>
+          </p:nvPr>
+        </p:nvSpPr>
+        <p:spPr/>
+      </p:sp>
+      <p:sp>
+        <p:nvSpPr>
+          <p:cNvPr id="3" name="Notes Placeholder 2"/>
+          <p:cNvSpPr>
+            <a:spLocks noGrp="1"/>
+          </p:cNvSpPr>
+          <p:nvPr>
+            <p:ph type="body" idx="3" sz="quarter"/>
+          </p:nvPr>
+        </p:nvSpPr>
+        <p:spPr/>
+        <p:txBody>
+          <a:bodyPr/>
+          <a:lstStyle/>
+          <a:p>
+            <a:r>
+              <a:t>The live-vs-annual honesty is a recurring theme; it protects the platform from over-claiming.</a:t>
+            </a:r>
+          </a:p>
+        </p:txBody>
+      </p:sp>
+      <p:sp>
+        <p:nvSpPr>
+          <p:cNvPr id="4" name="Slide Number Placeholder 3"/>
+          <p:cNvSpPr>
+            <a:spLocks noGrp="1"/>
+          </p:cNvSpPr>
+          <p:nvPr>
+            <p:ph type="sldNum" idx="5" sz="quarter"/>
+          </p:nvPr>
+        </p:nvSpPr>
+        <p:spPr/>
+      </p:sp>
+    </p:spTree>
+  </p:cSld>
+  <p:clrMapOvr>
+    <a:masterClrMapping/>
+  </p:clrMapOvr>
+</p:notes>
+</file>
+
+<file path=ppt/notesSlides/notesSlide36.xml><?xml version="1.0" encoding="utf-8"?>
+<p:notes xmlns:a="http://schemas.openxmlformats.org/drawingml/2006/main" xmlns:p="http://schemas.openxmlformats.org/presentationml/2006/main" xmlns:r="http://schemas.openxmlformats.org/officeDocument/2006/relationships">
+  <p:cSld>
+    <p:spTree>
+      <p:nvGrpSpPr>
+        <p:cNvPr id="1" name=""/>
+        <p:cNvGrpSpPr/>
+        <p:nvPr/>
+      </p:nvGrpSpPr>
+      <p:grpSpPr>
+        <a:xfrm>
+          <a:off x="0" y="0"/>
+          <a:ext cx="0" cy="0"/>
+          <a:chOff x="0" y="0"/>
+          <a:chExt cx="0" cy="0"/>
+        </a:xfrm>
+      </p:grpSpPr>
+      <p:sp>
+        <p:nvSpPr>
+          <p:cNvPr id="2" name="Slide Image Placeholder 1"/>
+          <p:cNvSpPr>
+            <a:spLocks noGrp="1"/>
+          </p:cNvSpPr>
+          <p:nvPr>
+            <p:ph type="sldImg" idx="2"/>
+          </p:nvPr>
+        </p:nvSpPr>
+        <p:spPr/>
+      </p:sp>
+      <p:sp>
+        <p:nvSpPr>
+          <p:cNvPr id="3" name="Notes Placeholder 2"/>
+          <p:cNvSpPr>
+            <a:spLocks noGrp="1"/>
+          </p:cNvSpPr>
+          <p:nvPr>
+            <p:ph type="body" idx="3" sz="quarter"/>
+          </p:nvPr>
+        </p:nvSpPr>
+        <p:spPr/>
+        <p:txBody>
+          <a:bodyPr/>
+          <a:lstStyle/>
+          <a:p>
+            <a:r>
+              <a:t>Close on agency: the point of all this data is to be used. Point to the API, the RTI Assistant, and contribute@janvayu.in.</a:t>
+            </a:r>
+          </a:p>
+        </p:txBody>
+      </p:sp>
+      <p:sp>
+        <p:nvSpPr>
+          <p:cNvPr id="4" name="Slide Number Placeholder 3"/>
+          <p:cNvSpPr>
+            <a:spLocks noGrp="1"/>
+          </p:cNvSpPr>
+          <p:nvPr>
+            <p:ph type="sldNum" idx="5" sz="quarter"/>
+          </p:nvPr>
+        </p:nvSpPr>
+        <p:spPr/>
+      </p:sp>
+    </p:spTree>
+  </p:cSld>
+  <p:clrMapOvr>
+    <a:masterClrMapping/>
+  </p:clrMapOvr>
+</p:notes>
+</file>
+
+<file path=ppt/notesSlides/notesSlide4.xml><?xml version="1.0" encoding="utf-8"?>
+<p:notes xmlns:a="http://schemas.openxmlformats.org/drawingml/2006/main" xmlns:p="http://schemas.openxmlformats.org/presentationml/2006/main" xmlns:r="http://schemas.openxmlformats.org/officeDocument/2006/relationships">
+  <p:cSld>
+    <p:spTree>
+      <p:nvGrpSpPr>
+        <p:cNvPr id="1" name=""/>
+        <p:cNvGrpSpPr/>
+        <p:nvPr/>
+      </p:nvGrpSpPr>
+      <p:grpSpPr>
+        <a:xfrm>
+          <a:off x="0" y="0"/>
+          <a:ext cx="0" cy="0"/>
+          <a:chOff x="0" y="0"/>
+          <a:chExt cx="0" cy="0"/>
+        </a:xfrm>
+      </p:grpSpPr>
+      <p:sp>
+        <p:nvSpPr>
+          <p:cNvPr id="2" name="Slide Image Placeholder 1"/>
+          <p:cNvSpPr>
+            <a:spLocks noGrp="1"/>
+          </p:cNvSpPr>
+          <p:nvPr>
+            <p:ph type="sldImg" idx="2"/>
+          </p:nvPr>
+        </p:nvSpPr>
+        <p:spPr/>
+      </p:sp>
+      <p:sp>
+        <p:nvSpPr>
+          <p:cNvPr id="3" name="Notes Placeholder 2"/>
+          <p:cNvSpPr>
+            <a:spLocks noGrp="1"/>
+          </p:cNvSpPr>
+          <p:nvPr>
+            <p:ph type="body" idx="3" sz="quarter"/>
+          </p:nvPr>
+        </p:nvSpPr>
+        <p:spPr/>
+        <p:txBody>
+          <a:bodyPr/>
+          <a:lstStyle/>
+          <a:p>
+            <a:r>
+              <a:t>Establish trust posture early: independence, sourcing, and the self-fact-checking discipline are the platform’s backbone.</a:t>
+            </a:r>
+          </a:p>
+        </p:txBody>
+      </p:sp>
+      <p:sp>
+        <p:nvSpPr>
+          <p:cNvPr id="4" name="Slide Number Placeholder 3"/>
+          <p:cNvSpPr>
+            <a:spLocks noGrp="1"/>
+          </p:cNvSpPr>
+          <p:nvPr>
+            <p:ph type="sldNum" idx="5" sz="quarter"/>
+          </p:nvPr>
+        </p:nvSpPr>
+        <p:spPr/>
+      </p:sp>
+    </p:spTree>
+  </p:cSld>
+  <p:clrMapOvr>
+    <a:masterClrMapping/>
+  </p:clrMapOvr>
+</p:notes>
+</file>
+
+<file path=ppt/notesSlides/notesSlide5.xml><?xml version="1.0" encoding="utf-8"?>
+<p:notes xmlns:a="http://schemas.openxmlformats.org/drawingml/2006/main" xmlns:p="http://schemas.openxmlformats.org/presentationml/2006/main" xmlns:r="http://schemas.openxmlformats.org/officeDocument/2006/relationships">
+  <p:cSld>
+    <p:spTree>
+      <p:nvGrpSpPr>
+        <p:cNvPr id="1" name=""/>
+        <p:cNvGrpSpPr/>
+        <p:nvPr/>
+      </p:nvGrpSpPr>
+      <p:grpSpPr>
+        <a:xfrm>
+          <a:off x="0" y="0"/>
+          <a:ext cx="0" cy="0"/>
+          <a:chOff x="0" y="0"/>
+          <a:chExt cx="0" cy="0"/>
+        </a:xfrm>
+      </p:grpSpPr>
+      <p:sp>
+        <p:nvSpPr>
+          <p:cNvPr id="2" name="Slide Image Placeholder 1"/>
+          <p:cNvSpPr>
+            <a:spLocks noGrp="1"/>
+          </p:cNvSpPr>
+          <p:nvPr>
+            <p:ph type="sldImg" idx="2"/>
+          </p:nvPr>
+        </p:nvSpPr>
+        <p:spPr/>
+      </p:sp>
+      <p:sp>
+        <p:nvSpPr>
+          <p:cNvPr id="3" name="Notes Placeholder 2"/>
+          <p:cNvSpPr>
+            <a:spLocks noGrp="1"/>
+          </p:cNvSpPr>
+          <p:nvPr>
+            <p:ph type="body" idx="3" sz="quarter"/>
+          </p:nvPr>
+        </p:nvSpPr>
+        <p:spPr/>
+        <p:txBody>
+          <a:bodyPr/>
+          <a:lstStyle/>
+          <a:p>
+            <a:r>
+              <a:t>The value-add is synthesis and honesty, not owning sensors. Name the sources so users can verify.</a:t>
+            </a:r>
+          </a:p>
+        </p:txBody>
+      </p:sp>
+      <p:sp>
+        <p:nvSpPr>
+          <p:cNvPr id="4" name="Slide Number Placeholder 3"/>
+          <p:cNvSpPr>
+            <a:spLocks noGrp="1"/>
+          </p:cNvSpPr>
+          <p:nvPr>
+            <p:ph type="sldNum" idx="5" sz="quarter"/>
+          </p:nvPr>
+        </p:nvSpPr>
+        <p:spPr/>
+      </p:sp>
+    </p:spTree>
+  </p:cSld>
+  <p:clrMapOvr>
+    <a:masterClrMapping/>
+  </p:clrMapOvr>
+</p:notes>
+</file>
+
+<file path=ppt/notesSlides/notesSlide6.xml><?xml version="1.0" encoding="utf-8"?>
+<p:notes xmlns:a="http://schemas.openxmlformats.org/drawingml/2006/main" xmlns:p="http://schemas.openxmlformats.org/presentationml/2006/main" xmlns:r="http://schemas.openxmlformats.org/officeDocument/2006/relationships">
+  <p:cSld>
+    <p:spTree>
+      <p:nvGrpSpPr>
+        <p:cNvPr id="1" name=""/>
+        <p:cNvGrpSpPr/>
+        <p:nvPr/>
+      </p:nvGrpSpPr>
+      <p:grpSpPr>
+        <a:xfrm>
+          <a:off x="0" y="0"/>
+          <a:ext cx="0" cy="0"/>
+          <a:chOff x="0" y="0"/>
+          <a:chExt cx="0" cy="0"/>
+        </a:xfrm>
+      </p:grpSpPr>
+      <p:sp>
+        <p:nvSpPr>
+          <p:cNvPr id="2" name="Slide Image Placeholder 1"/>
+          <p:cNvSpPr>
+            <a:spLocks noGrp="1"/>
+          </p:cNvSpPr>
+          <p:nvPr>
+            <p:ph type="sldImg" idx="2"/>
+          </p:nvPr>
+        </p:nvSpPr>
+        <p:spPr/>
+      </p:sp>
+      <p:sp>
+        <p:nvSpPr>
+          <p:cNvPr id="3" name="Notes Placeholder 2"/>
+          <p:cNvSpPr>
+            <a:spLocks noGrp="1"/>
+          </p:cNvSpPr>
+          <p:nvPr>
+            <p:ph type="body" idx="3" sz="quarter"/>
+          </p:nvPr>
+        </p:nvSpPr>
+        <p:spPr/>
+        <p:txBody>
+          <a:bodyPr/>
+          <a:lstStyle/>
+          <a:p>
+            <a:r>
+              <a:t>Chapter 2 — The live picture. The real-time surfaces — the parts people check daily.</a:t>
+            </a:r>
+          </a:p>
+        </p:txBody>
+      </p:sp>
+      <p:sp>
+        <p:nvSpPr>
+          <p:cNvPr id="4" name="Slide Number Placeholder 3"/>
+          <p:cNvSpPr>
+            <a:spLocks noGrp="1"/>
+          </p:cNvSpPr>
+          <p:nvPr>
+            <p:ph type="sldNum" idx="5" sz="quarter"/>
+          </p:nvPr>
+        </p:nvSpPr>
+        <p:spPr/>
+      </p:sp>
+    </p:spTree>
+  </p:cSld>
+  <p:clrMapOvr>
+    <a:masterClrMapping/>
+  </p:clrMapOvr>
+</p:notes>
+</file>
+
+<file path=ppt/notesSlides/notesSlide7.xml><?xml version="1.0" encoding="utf-8"?>
+<p:notes xmlns:a="http://schemas.openxmlformats.org/drawingml/2006/main" xmlns:p="http://schemas.openxmlformats.org/presentationml/2006/main" xmlns:r="http://schemas.openxmlformats.org/officeDocument/2006/relationships">
+  <p:cSld>
+    <p:spTree>
+      <p:nvGrpSpPr>
+        <p:cNvPr id="1" name=""/>
+        <p:cNvGrpSpPr/>
+        <p:nvPr/>
+      </p:nvGrpSpPr>
+      <p:grpSpPr>
+        <a:xfrm>
+          <a:off x="0" y="0"/>
+          <a:ext cx="0" cy="0"/>
+          <a:chOff x="0" y="0"/>
+          <a:chExt cx="0" cy="0"/>
+        </a:xfrm>
+      </p:grpSpPr>
+      <p:sp>
+        <p:nvSpPr>
+          <p:cNvPr id="2" name="Slide Image Placeholder 1"/>
+          <p:cNvSpPr>
+            <a:spLocks noGrp="1"/>
+          </p:cNvSpPr>
+          <p:nvPr>
+            <p:ph type="sldImg" idx="2"/>
+          </p:nvPr>
+        </p:nvSpPr>
+        <p:spPr/>
+      </p:sp>
+      <p:sp>
+        <p:nvSpPr>
+          <p:cNvPr id="3" name="Notes Placeholder 2"/>
+          <p:cNvSpPr>
+            <a:spLocks noGrp="1"/>
+          </p:cNvSpPr>
+          <p:nvPr>
+            <p:ph type="body" idx="3" sz="quarter"/>
+          </p:nvPr>
+        </p:nvSpPr>
+        <p:spPr/>
+        <p:txBody>
+          <a:bodyPr/>
+          <a:lstStyle/>
+          <a:p>
+            <a:r>
+              <a:t>Walk the dashboard top to bottom; point out the city selector drives the whole page.</a:t>
+            </a:r>
+          </a:p>
+        </p:txBody>
+      </p:sp>
+      <p:sp>
+        <p:nvSpPr>
+          <p:cNvPr id="4" name="Slide Number Placeholder 3"/>
+          <p:cNvSpPr>
+            <a:spLocks noGrp="1"/>
+          </p:cNvSpPr>
+          <p:nvPr>
+            <p:ph type="sldNum" idx="5" sz="quarter"/>
+          </p:nvPr>
+        </p:nvSpPr>
+        <p:spPr/>
+      </p:sp>
+    </p:spTree>
+  </p:cSld>
+  <p:clrMapOvr>
+    <a:masterClrMapping/>
+  </p:clrMapOvr>
+</p:notes>
+</file>
+
+<file path=ppt/notesSlides/notesSlide8.xml><?xml version="1.0" encoding="utf-8"?>
+<p:notes xmlns:a="http://schemas.openxmlformats.org/drawingml/2006/main" xmlns:p="http://schemas.openxmlformats.org/presentationml/2006/main" xmlns:r="http://schemas.openxmlformats.org/officeDocument/2006/relationships">
+  <p:cSld>
+    <p:spTree>
+      <p:nvGrpSpPr>
+        <p:cNvPr id="1" name=""/>
+        <p:cNvGrpSpPr/>
+        <p:nvPr/>
+      </p:nvGrpSpPr>
+      <p:grpSpPr>
+        <a:xfrm>
+          <a:off x="0" y="0"/>
+          <a:ext cx="0" cy="0"/>
+          <a:chOff x="0" y="0"/>
+          <a:chExt cx="0" cy="0"/>
+        </a:xfrm>
+      </p:grpSpPr>
+      <p:sp>
+        <p:nvSpPr>
+          <p:cNvPr id="2" name="Slide Image Placeholder 1"/>
+          <p:cNvSpPr>
+            <a:spLocks noGrp="1"/>
+          </p:cNvSpPr>
+          <p:nvPr>
+            <p:ph type="sldImg" idx="2"/>
+          </p:nvPr>
+        </p:nvSpPr>
+        <p:spPr/>
+      </p:sp>
+      <p:sp>
+        <p:nvSpPr>
+          <p:cNvPr id="3" name="Notes Placeholder 2"/>
+          <p:cNvSpPr>
+            <a:spLocks noGrp="1"/>
+          </p:cNvSpPr>
+          <p:nvPr>
+            <p:ph type="body" idx="3" sz="quarter"/>
+          </p:nvPr>
+        </p:nvSpPr>
+        <p:spPr/>
+        <p:txBody>
+          <a:bodyPr/>
+          <a:lstStyle/>
+          <a:p>
+            <a:r>
+              <a:t>Core cities load live; the rest load when picked, to stay inside the data source’s free tier — but that’s a build detail, not something the reader needs on screen.</a:t>
+            </a:r>
+          </a:p>
+        </p:txBody>
+      </p:sp>
+      <p:sp>
+        <p:nvSpPr>
+          <p:cNvPr id="4" name="Slide Number Placeholder 3"/>
+          <p:cNvSpPr>
+            <a:spLocks noGrp="1"/>
+          </p:cNvSpPr>
+          <p:nvPr>
+            <p:ph type="sldNum" idx="5" sz="quarter"/>
+          </p:nvPr>
+        </p:nvSpPr>
+        <p:spPr/>
+      </p:sp>
+    </p:spTree>
+  </p:cSld>
+  <p:clrMapOvr>
+    <a:masterClrMapping/>
+  </p:clrMapOvr>
+</p:notes>
+</file>
+
+<file path=ppt/notesSlides/notesSlide9.xml><?xml version="1.0" encoding="utf-8"?>
+<p:notes xmlns:a="http://schemas.openxmlformats.org/drawingml/2006/main" xmlns:p="http://schemas.openxmlformats.org/presentationml/2006/main" xmlns:r="http://schemas.openxmlformats.org/officeDocument/2006/relationships">
+  <p:cSld>
+    <p:spTree>
+      <p:nvGrpSpPr>
+        <p:cNvPr id="1" name=""/>
+        <p:cNvGrpSpPr/>
+        <p:nvPr/>
+      </p:nvGrpSpPr>
+      <p:grpSpPr>
+        <a:xfrm>
+          <a:off x="0" y="0"/>
+          <a:ext cx="0" cy="0"/>
+          <a:chOff x="0" y="0"/>
+          <a:chExt cx="0" cy="0"/>
+        </a:xfrm>
+      </p:grpSpPr>
+      <p:sp>
+        <p:nvSpPr>
+          <p:cNvPr id="2" name="Slide Image Placeholder 1"/>
+          <p:cNvSpPr>
+            <a:spLocks noGrp="1"/>
+          </p:cNvSpPr>
+          <p:nvPr>
+            <p:ph type="sldImg" idx="2"/>
+          </p:nvPr>
+        </p:nvSpPr>
+        <p:spPr/>
+      </p:sp>
+      <p:sp>
+        <p:nvSpPr>
+          <p:cNvPr id="3" name="Notes Placeholder 2"/>
+          <p:cNvSpPr>
+            <a:spLocks noGrp="1"/>
+          </p:cNvSpPr>
+          <p:nvPr>
+            <p:ph type="body" idx="3" sz="quarter"/>
+          </p:nvPr>
+        </p:nvSpPr>
+        <p:spPr/>
+        <p:txBody>
+          <a:bodyPr/>
+          <a:lstStyle/>
+          <a:p>
+            <a:r>
+              <a:t>Emphasise the grey constituencies: that is the real monitoring gap, not a rendering error. Boundaries and source locations come from indianopenmaps.com (SBM, LGD, GatiShakti mirrors), attributed on the map.</a:t>
             </a:r>
           </a:p>
         </p:txBody>

--- a/walkthrough/JanVayu_Full_Walkthrough.pptx
+++ b/walkthrough/JanVayu_Full_Walkthrough.pptx
@@ -747,7 +747,7 @@
           <a:lstStyle/>
           <a:p>
             <a:r>
-              <a:t>Be honest on screen that the air layer is a live estimate of the citywide SPREAD, not a per-street reading. 24 of the 39 cities use Swachh Bharat Mission ward boundaries via indianopenmaps.com; a few (Rajkot, Vadodara) published only coarse revenue wards, and we show what they published.</a:t>
+              <a:t>Be honest on screen that the air layer is a live estimate of the citywide SPREAD, not a per-street reading; heat/green/built are satellite-derived for all 39 cities. 24 of the 39 use Swachh Bharat Mission ward boundaries via indianopenmaps.com; a few (Rajkot, Vadodara) published only coarse revenue wards, and we show what they published.</a:t>
             </a:r>
           </a:p>
         </p:txBody>

--- a/walkthrough/JanVayu_Full_Walkthrough.pptx
+++ b/walkthrough/JanVayu_Full_Walkthrough.pptx
@@ -677,7 +677,7 @@
           <a:lstStyle/>
           <a:p>
             <a:r>
-              <a:t>The forecast is key-less and free; it feeds the chatbot’s tomorrow-answers too.</a:t>
+              <a:t>The forecast is key-less and free; it feeds the chatbot’s tomorrow-answers too. Be honest about the fire map’s season — it peaks mid-Oct to late-Nov and is quiet the rest of the year.</a:t>
             </a:r>
           </a:p>
         </p:txBody>
@@ -817,7 +817,7 @@
           <a:lstStyle/>
           <a:p>
             <a:r>
-              <a:t>Push is real VAPID web push; alerts are gated on a user-picked threshold.</a:t>
+              <a:t>Push is real VAPID web push; alerts are gated on a user-picked threshold. Both the main site and the standalone Ask JanVayu app install as PWAs on Android, iOS and desktop.</a:t>
             </a:r>
           </a:p>
         </p:txBody>
@@ -1937,7 +1937,7 @@
           <a:lstStyle/>
           <a:p>
             <a:r>
-              <a:t>Story-of-the-week rotates weekly with no deploy; it surfaces the blog.</a:t>
+              <a:t>Story-of-the-week rotates weekly with no deploy; it surfaces the blog. Every gallery photograph carries its own credit and source link.</a:t>
             </a:r>
           </a:p>
         </p:txBody>
@@ -2147,7 +2147,7 @@
           <a:lstStyle/>
           <a:p>
             <a:r>
-              <a:t>Be candid: grounding the chatbot in the verified figures with citations is the next trust upgrade.</a:t>
+              <a:t>It answers from JanVayu’s own verified figures and cites them; an eval suite gates it against fabricated citations and invented orders or schemes.</a:t>
             </a:r>
           </a:p>
         </p:txBody>

--- a/walkthrough/JanVayu_Full_Walkthrough.pptx
+++ b/walkthrough/JanVayu_Full_Walkthrough.pptx
@@ -41,6 +41,7 @@
     <p:sldId id="289" r:id="rId41"/>
     <p:sldId id="290" r:id="rId42"/>
     <p:sldId id="291" r:id="rId43"/>
+    <p:sldId id="292" r:id="rId44"/>
   </p:sldIdLst>
   <p:sldSz cx="12192000" cy="6858000" type="screen4x3"/>
   <p:notesSz cx="6858000" cy="9144000"/>
@@ -817,7 +818,7 @@
           <a:lstStyle/>
           <a:p>
             <a:r>
-              <a:t>Push is real VAPID web push; alerts are gated on a user-picked threshold. Both the main site and the standalone Ask JanVayu app install as PWAs on Android, iOS and desktop.</a:t>
+              <a:t>The point of this slide is the monitoring gap: ~565 continuous CPCB stations against 584,615 villages, so the live network can never answer "how is my village's air". Satellite fills it on a DIFFERENT timescale — annual, not today. Keep the two apart out loud. Two honest caveats: a ~1 km product smooths hyperlocal sources (a kiln next door won't show), and it is modelled and calibrated, not measured in the village. The finding worth saying: not one Indian village meets the WHO guideline of 5, and 63.6% are above India's own limit of 40.</a:t>
             </a:r>
           </a:p>
         </p:txBody>
@@ -887,7 +888,7 @@
           <a:lstStyle/>
           <a:p>
             <a:r>
-              <a:t>Chapter 3 — Health &amp; exposure. Translate the numbers into what they mean for a body.</a:t>
+              <a:t>Push is real VAPID web push; alerts are gated on a user-picked threshold. Both the main site and the standalone Ask JanVayu app install as PWAs on Android, iOS and desktop.</a:t>
             </a:r>
           </a:p>
         </p:txBody>
@@ -957,7 +958,7 @@
           <a:lstStyle/>
           <a:p>
             <a:r>
-              <a:t>Beyond-the-lungs is the emotional core; use the hand-drawn body diagram.</a:t>
+              <a:t>Chapter 3 — Health &amp; exposure. Translate the numbers into what they mean for a body.</a:t>
             </a:r>
           </a:p>
         </p:txBody>
@@ -1027,7 +1028,7 @@
           <a:lstStyle/>
           <a:p>
             <a:r>
-              <a:t>Frame as an equity story; both panels carry the corrected, fact-checked figures.</a:t>
+              <a:t>Beyond-the-lungs is the emotional core; use the hand-drawn body diagram.</a:t>
             </a:r>
           </a:p>
         </p:txBody>
@@ -1097,7 +1098,7 @@
           <a:lstStyle/>
           <a:p>
             <a:r>
-              <a:t>The diary is a habit tool; note it is localStorage-only today.</a:t>
+              <a:t>Frame as an equity story; both panels carry the corrected, fact-checked figures.</a:t>
             </a:r>
           </a:p>
         </p:txBody>
@@ -1167,7 +1168,7 @@
           <a:lstStyle/>
           <a:p>
             <a:r>
-              <a:t>These are the decision tools; the purifier sizing and GRAP rules are fact-checked.</a:t>
+              <a:t>The diary is a habit tool; note it is localStorage-only today.</a:t>
             </a:r>
           </a:p>
         </p:txBody>
@@ -1237,7 +1238,7 @@
           <a:lstStyle/>
           <a:p>
             <a:r>
-              <a:t>Chapter 4 — The economic bill. The macroeconomic case, for policy audiences.</a:t>
+              <a:t>These are the decision tools; the purifier sizing and GRAP rules are fact-checked.</a:t>
             </a:r>
           </a:p>
         </p:txBody>
@@ -1377,7 +1378,7 @@
           <a:lstStyle/>
           <a:p>
             <a:r>
-              <a:t>Use the economy diagram; the $339B figure is the corrected, sourced value with its method noted.</a:t>
+              <a:t>Chapter 4 — The economic bill. The macroeconomic case, for policy audiences.</a:t>
             </a:r>
           </a:p>
         </p:txBody>
@@ -1447,7 +1448,7 @@
           <a:lstStyle/>
           <a:p>
             <a:r>
-              <a:t>Chapter 5 — Following the money. Accountability — the differentiator versus a plain dashboard.</a:t>
+              <a:t>Use the economy diagram; the $339B figure is the corrected, sourced value with its method noted.</a:t>
             </a:r>
           </a:p>
         </p:txBody>
@@ -1517,7 +1518,7 @@
           <a:lstStyle/>
           <a:p>
             <a:r>
-              <a:t>Budget figures were refreshed to CREA 2026 in the fact-check; note the dust-vs-source mismatch.</a:t>
+              <a:t>Chapter 5 — Following the money. Accountability — the differentiator versus a plain dashboard.</a:t>
             </a:r>
           </a:p>
         </p:txBody>
@@ -1587,7 +1588,7 @@
           <a:lstStyle/>
           <a:p>
             <a:r>
-              <a:t>The scorecard’s “File an RTI” pre-fills the RTI Assistant for that city.</a:t>
+              <a:t>Budget figures were refreshed to CREA 2026 in the fact-check; note the dust-vs-source mismatch.</a:t>
             </a:r>
           </a:p>
         </p:txBody>
@@ -1657,7 +1658,7 @@
           <a:lstStyle/>
           <a:p>
             <a:r>
-              <a:t>The apportionment ring is the newest panel; each city cites its own study with a method caveat.</a:t>
+              <a:t>The scorecard’s “File an RTI” pre-fills the RTI Assistant for that city.</a:t>
             </a:r>
           </a:p>
         </p:txBody>
@@ -1727,7 +1728,7 @@
           <a:lstStyle/>
           <a:p>
             <a:r>
-              <a:t>Demo the scorecard → RTI hand-off; it’s the platform’s theory of change in one flow.</a:t>
+              <a:t>The apportionment ring is the newest panel; each city cites its own study with a method caveat.</a:t>
             </a:r>
           </a:p>
         </p:txBody>
@@ -1797,7 +1798,7 @@
           <a:lstStyle/>
           <a:p>
             <a:r>
-              <a:t>Chapter 6 — Citizen action. Turn readers into participants.</a:t>
+              <a:t>Demo the scorecard → RTI hand-off; it’s the platform’s theory of change in one flow.</a:t>
             </a:r>
           </a:p>
         </p:txBody>
@@ -1867,7 +1868,7 @@
           <a:lstStyle/>
           <a:p>
             <a:r>
-              <a:t>Games + the new air-literacy quiz make this classroom-ready; workshops connect to a live facilitator.</a:t>
+              <a:t>Chapter 6 — Citizen action. Turn readers into participants.</a:t>
             </a:r>
           </a:p>
         </p:txBody>
@@ -1937,7 +1938,7 @@
           <a:lstStyle/>
           <a:p>
             <a:r>
-              <a:t>Story-of-the-week rotates weekly with no deploy; it surfaces the blog. Every gallery photograph carries its own credit and source link.</a:t>
+              <a:t>Games + the new air-literacy quiz make this classroom-ready; workshops connect to a live facilitator.</a:t>
             </a:r>
           </a:p>
         </p:txBody>
@@ -2007,7 +2008,7 @@
           <a:lstStyle/>
           <a:p>
             <a:r>
-              <a:t>Chapter 7 — Tools &amp; knowledge. The reference layer and the take-it-with-you surfaces.</a:t>
+              <a:t>Story-of-the-week rotates weekly with no deploy; it surfaces the blog. Every gallery photograph carries its own credit and source link.</a:t>
             </a:r>
           </a:p>
         </p:txBody>
@@ -2147,7 +2148,7 @@
           <a:lstStyle/>
           <a:p>
             <a:r>
-              <a:t>It answers from JanVayu’s own verified figures and cites them; an eval suite gates it against fabricated citations and invented orders or schemes.</a:t>
+              <a:t>Chapter 7 — Tools &amp; knowledge. The reference layer and the take-it-with-you surfaces.</a:t>
             </a:r>
           </a:p>
         </p:txBody>
@@ -2217,7 +2218,7 @@
           <a:lstStyle/>
           <a:p>
             <a:r>
-              <a:t>Reading List is a real Zotero group; the AQI explainer’s CPCB-vs-EPA table was just corrected.</a:t>
+              <a:t>It answers from JanVayu’s own verified figures and cites them; an eval suite gates it against fabricated citations and invented orders or schemes.</a:t>
             </a:r>
           </a:p>
         </p:txBody>
@@ -2287,7 +2288,7 @@
           <a:lstStyle/>
           <a:p>
             <a:r>
-              <a:t>The API + embeds are the “use JanVayu in your work” surface; licence and citation are included.</a:t>
+              <a:t>Reading List is a real Zotero group; the AQI explainer’s CPCB-vs-EPA table was just corrected.</a:t>
             </a:r>
           </a:p>
         </p:txBody>
@@ -2357,7 +2358,7 @@
           <a:lstStyle/>
           <a:p>
             <a:r>
-              <a:t>Chapter 8 — Trust. Close the loop on why any of these numbers can be believed.</a:t>
+              <a:t>The API + embeds are the “use JanVayu in your work” surface; licence and citation are included.</a:t>
             </a:r>
           </a:p>
         </p:txBody>
@@ -2427,7 +2428,7 @@
           <a:lstStyle/>
           <a:p>
             <a:r>
-              <a:t>This is what separates JanVayu from a marketing site; the weekly PR-for-review loop is real.</a:t>
+              <a:t>Chapter 8 — Trust. Close the loop on why any of these numbers can be believed.</a:t>
             </a:r>
           </a:p>
         </p:txBody>
@@ -2497,6 +2498,76 @@
           <a:lstStyle/>
           <a:p>
             <a:r>
+              <a:t>This is what separates JanVayu from a marketing site; the weekly PR-for-review loop is real.</a:t>
+            </a:r>
+          </a:p>
+        </p:txBody>
+      </p:sp>
+      <p:sp>
+        <p:nvSpPr>
+          <p:cNvPr id="4" name="Slide Number Placeholder 3"/>
+          <p:cNvSpPr>
+            <a:spLocks noGrp="1"/>
+          </p:cNvSpPr>
+          <p:nvPr>
+            <p:ph type="sldNum" idx="5" sz="quarter"/>
+          </p:nvPr>
+        </p:nvSpPr>
+        <p:spPr/>
+      </p:sp>
+    </p:spTree>
+  </p:cSld>
+  <p:clrMapOvr>
+    <a:masterClrMapping/>
+  </p:clrMapOvr>
+</p:notes>
+</file>
+
+<file path=ppt/notesSlides/notesSlide36.xml><?xml version="1.0" encoding="utf-8"?>
+<p:notes xmlns:a="http://schemas.openxmlformats.org/drawingml/2006/main" xmlns:p="http://schemas.openxmlformats.org/presentationml/2006/main" xmlns:r="http://schemas.openxmlformats.org/officeDocument/2006/relationships">
+  <p:cSld>
+    <p:spTree>
+      <p:nvGrpSpPr>
+        <p:cNvPr id="1" name=""/>
+        <p:cNvGrpSpPr/>
+        <p:nvPr/>
+      </p:nvGrpSpPr>
+      <p:grpSpPr>
+        <a:xfrm>
+          <a:off x="0" y="0"/>
+          <a:ext cx="0" cy="0"/>
+          <a:chOff x="0" y="0"/>
+          <a:chExt cx="0" cy="0"/>
+        </a:xfrm>
+      </p:grpSpPr>
+      <p:sp>
+        <p:nvSpPr>
+          <p:cNvPr id="2" name="Slide Image Placeholder 1"/>
+          <p:cNvSpPr>
+            <a:spLocks noGrp="1"/>
+          </p:cNvSpPr>
+          <p:nvPr>
+            <p:ph type="sldImg" idx="2"/>
+          </p:nvPr>
+        </p:nvSpPr>
+        <p:spPr/>
+      </p:sp>
+      <p:sp>
+        <p:nvSpPr>
+          <p:cNvPr id="3" name="Notes Placeholder 2"/>
+          <p:cNvSpPr>
+            <a:spLocks noGrp="1"/>
+          </p:cNvSpPr>
+          <p:nvPr>
+            <p:ph type="body" idx="3" sz="quarter"/>
+          </p:nvPr>
+        </p:nvSpPr>
+        <p:spPr/>
+        <p:txBody>
+          <a:bodyPr/>
+          <a:lstStyle/>
+          <a:p>
+            <a:r>
               <a:t>The live-vs-annual honesty is a recurring theme; it protects the platform from over-claiming.</a:t>
             </a:r>
           </a:p>
@@ -2522,7 +2593,7 @@
 </p:notes>
 </file>
 
-<file path=ppt/notesSlides/notesSlide36.xml><?xml version="1.0" encoding="utf-8"?>
+<file path=ppt/notesSlides/notesSlide37.xml><?xml version="1.0" encoding="utf-8"?>
 <p:notes xmlns:a="http://schemas.openxmlformats.org/drawingml/2006/main" xmlns:p="http://schemas.openxmlformats.org/presentationml/2006/main" xmlns:r="http://schemas.openxmlformats.org/officeDocument/2006/relationships">
   <p:cSld>
     <p:spTree>
@@ -7214,6 +7285,48 @@
       <p:pic>
         <p:nvPicPr>
           <p:cNvPr id="2" name="Picture 1" descr="slide-36.jpg"/>
+          <p:cNvPicPr>
+            <a:picLocks noChangeAspect="1"/>
+          </p:cNvPicPr>
+          <p:nvPr/>
+        </p:nvPicPr>
+        <p:blipFill>
+          <a:blip r:embed="rId2"/>
+          <a:stretch>
+            <a:fillRect/>
+          </a:stretch>
+        </p:blipFill>
+        <p:spPr>
+          <a:xfrm>
+            <a:off x="0" y="0"/>
+            <a:ext cx="12192000" cy="6858000"/>
+          </a:xfrm>
+          <a:prstGeom prst="rect">
+            <a:avLst/>
+          </a:prstGeom>
+        </p:spPr>
+      </p:pic>
+    </p:spTree>
+  </p:cSld>
+  <p:clrMapOvr>
+    <a:masterClrMapping/>
+  </p:clrMapOvr>
+</p:sld>
+</file>
+
+<file path=ppt/slides/slide37.xml><?xml version="1.0" encoding="utf-8"?>
+<p:sld xmlns:a="http://schemas.openxmlformats.org/drawingml/2006/main" xmlns:p="http://schemas.openxmlformats.org/presentationml/2006/main" xmlns:r="http://schemas.openxmlformats.org/officeDocument/2006/relationships">
+  <p:cSld>
+    <p:spTree>
+      <p:nvGrpSpPr>
+        <p:cNvPr id="1" name=""/>
+        <p:cNvGrpSpPr/>
+        <p:nvPr/>
+      </p:nvGrpSpPr>
+      <p:grpSpPr/>
+      <p:pic>
+        <p:nvPicPr>
+          <p:cNvPr id="2" name="Picture 1" descr="slide-37.jpg"/>
           <p:cNvPicPr>
             <a:picLocks noChangeAspect="1"/>
           </p:cNvPicPr>

--- a/walkthrough/JanVayu_Full_Walkthrough.pptx
+++ b/walkthrough/JanVayu_Full_Walkthrough.pptx
@@ -748,7 +748,7 @@
           <a:lstStyle/>
           <a:p>
             <a:r>
-              <a:t>Be honest on screen that the air layer is a live estimate of the citywide SPREAD, not a per-street reading; heat/green/built are satellite-derived for all 39 cities. 24 of the 39 use Swachh Bharat Mission ward boundaries via indianopenmaps.com; a few (Rajkot, Vadodara) published only coarse revenue wards, and we show what they published.</a:t>
+              <a:t>Be honest on screen that the air layer is a live estimate of the citywide SPREAD, not a per-street reading; heat/green/built are satellite-derived for 39 of the 89 so far. 74 of the 89 use Swachh Bharat Mission ward boundaries via indianopenmaps.com; a few (Rajkot, Vadodara) published only coarse revenue wards, and we show what they published.</a:t>
             </a:r>
           </a:p>
         </p:txBody>

--- a/walkthrough/JanVayu_Full_Walkthrough.pptx
+++ b/walkthrough/JanVayu_Full_Walkthrough.pptx
@@ -748,7 +748,7 @@
           <a:lstStyle/>
           <a:p>
             <a:r>
-              <a:t>Be honest on screen that the air layer is a live estimate of the citywide SPREAD, not a per-street reading; heat/green/built are satellite-derived for 39 of the 89 so far. 74 of the 89 use Swachh Bharat Mission ward boundaries via indianopenmaps.com; a few (Rajkot, Vadodara) published only coarse revenue wards, and we show what they published.</a:t>
+              <a:t>Be honest on screen that the air layer is a live estimate of the citywide SPREAD, not a per-street reading; heat/green/built are satellite-derived for 39 of the 90 so far. 74 of the 90 use Swachh Bharat Mission ward boundaries via indianopenmaps.com; a few (Rajkot, Vadodara) published only coarse revenue wards, and we show what they published. Guwahati is the newest and comes from a different source — OpenCity/Oorvani via BharatLas under ODbL — because Swachh Bharat carries no Assam wards at all; the boundary credit under the map names the source for whichever city is on screen.</a:t>
             </a:r>
           </a:p>
         </p:txBody>

--- a/walkthrough/JanVayu_Full_Walkthrough.pptx
+++ b/walkthrough/JanVayu_Full_Walkthrough.pptx
@@ -748,7 +748,7 @@
           <a:lstStyle/>
           <a:p>
             <a:r>
-              <a:t>Be honest on screen that the air layer is a live estimate of the citywide SPREAD, not a per-street reading; heat/green/built are satellite-derived for 39 of the 90 so far. 74 of the 90 use Swachh Bharat Mission ward boundaries via indianopenmaps.com; a few (Rajkot, Vadodara) published only coarse revenue wards, and we show what they published. Guwahati is the newest and comes from a different source — OpenCity/Oorvani via BharatLas under ODbL — because Swachh Bharat carries no Assam wards at all; the boundary credit under the map names the source for whichever city is on screen.</a:t>
+              <a:t>Be honest on screen that the air layer is a live estimate of the citywide SPREAD, not a per-street reading; all five layers now cover all 97 cities. 74 use Swachh Bharat Mission ward boundaries via indianopenmaps.com; a few (Jamnagar, Rajkot, Vadodara) published only coarse revenue wards, and we show what they published. Guwahati comes from OpenCity/Oorvani via BharatLas under ODbL, and seven West Bengal cities from the state’s AMRUT GIS master plans — Swachh Bharat carries no Assam or Bengal wards at all. The boundary credit under the map names the source for whichever city is on screen. Worth saying out loud on this slide: Durgapur (63) and Asansol (61 µg/m³ annual) are dirtier than Kolkata (49) — the industrial belt, not the metro, is Bengal’s worst air.</a:t>
             </a:r>
           </a:p>
         </p:txBody>

--- a/walkthrough/JanVayu_Full_Walkthrough.pptx
+++ b/walkthrough/JanVayu_Full_Walkthrough.pptx
@@ -748,7 +748,7 @@
           <a:lstStyle/>
           <a:p>
             <a:r>
-              <a:t>Be honest on screen that the air layer is a live estimate of the citywide SPREAD, not a per-street reading; all five layers now cover all 97 cities. 74 use Swachh Bharat Mission ward boundaries via indianopenmaps.com; a few (Jamnagar, Rajkot, Vadodara) published only coarse revenue wards, and we show what they published. Guwahati comes from OpenCity/Oorvani via BharatLas under ODbL, and seven West Bengal cities from the state’s AMRUT GIS master plans — Swachh Bharat carries no Assam or Bengal wards at all. The boundary credit under the map names the source for whichever city is on screen. Worth saying out loud on this slide: Durgapur (63) and Asansol (61 µg/m³ annual) are dirtier than Kolkata (49) — the industrial belt, not the metro, is Bengal’s worst air.</a:t>
+              <a:t>Be honest on screen that the air layer is a live estimate of the citywide SPREAD, not a per-street reading; all five layers now cover all 142 cities. Five upstreams under different licences, and the credit under the map names the source for whichever city is on screen. Two things worth saying out loud here: every state capital is now mapped, including seven that never had a ward map — and Agartala (61 µg/m³ annual) is 2.5× the other Northeast capitals (Itanagar 24, Aizawl 24, Kohima 24), which nobody could see before. And in Bengal, Durgapur (63) and Asansol (61) beat Kolkata (49): the industrial belt, not the metro.</a:t>
             </a:r>
           </a:p>
         </p:txBody>

--- a/walkthrough/JanVayu_Full_Walkthrough.pptx
+++ b/walkthrough/JanVayu_Full_Walkthrough.pptx
@@ -748,7 +748,7 @@
           <a:lstStyle/>
           <a:p>
             <a:r>
-              <a:t>Be honest on screen that the air layer is a live estimate of the citywide SPREAD, not a per-street reading; all five layers now cover all 142 cities. Five upstreams under different licences, and the credit under the map names the source for whichever city is on screen. Two things worth saying out loud here: every state capital is now mapped, including seven that never had a ward map — and Agartala (61 µg/m³ annual) is 2.5× the other Northeast capitals (Itanagar 24, Aizawl 24, Kohima 24), which nobody could see before. And in Bengal, Durgapur (63) and Asansol (61) beat Kolkata (49): the industrial belt, not the metro.</a:t>
+              <a:t>The old version was a dropdown of 142 cities — if your town was not on the list you got nothing. That was our database structure leaking into the navigation. Say the two timescales out loud: the dots are live monitors, the shading is a yearly satellite average, and they are never the same sentence. The green-vs-tree distinction is the one to demo: green counts cropland, so the typical Indian district is 97% green and 14% treed.</a:t>
             </a:r>
           </a:p>
         </p:txBody>
@@ -2008,7 +2008,7 @@
           <a:lstStyle/>
           <a:p>
             <a:r>
-              <a:t>Story-of-the-week rotates weekly with no deploy; it surfaces the blog. Every gallery photograph carries its own credit and source link.</a:t>
+              <a:t>If someone asks why X and Instagram are only links: neither can be read without a paid or authenticated API, so we link to the live search rather than show a feed that is not one — and every X link on the site is checked against X’s public embed endpoint before it ships. The blog section is generated from the blog index, so publishing is enough to reach the front page. Every gallery photograph carries its own credit and source link.</a:t>
             </a:r>
           </a:p>
         </p:txBody>
